--- a/Unit 12/Unit 12 For Live Session V2.pptx
+++ b/Unit 12/Unit 12 For Live Session V2.pptx
@@ -2446,7 +2446,7 @@
             </a:pPr>
             <a:r>
               <a:rPr lang="en-US" dirty="0"/>
-              <a:t>Let the user read in the data (the Beer Data.) </a:t>
+              <a:t>Let the user read in the data (the Attrition Data from Project 1).</a:t>
             </a:r>
           </a:p>
           <a:p>
@@ -2455,7 +2455,7 @@
             </a:pPr>
             <a:r>
               <a:rPr lang="en-US" dirty="0"/>
-              <a:t>Let the user make a histogram of the IBU</a:t>
+              <a:t>Let the user make a histogram of the monthly income</a:t>
             </a:r>
           </a:p>
           <a:p>
@@ -2464,7 +2464,7 @@
             </a:pPr>
             <a:r>
               <a:rPr lang="en-US" dirty="0"/>
-              <a:t>Let the user make a histogram of the ABV  (separate histogram)</a:t>
+              <a:t>Let the user switch back and forth between histograms and boxplots to represent this information.  You could do this with a radio button that switches the plot from histogram to boxplot … the implementation however is up to you. </a:t>
             </a:r>
           </a:p>
           <a:p>
@@ -2473,7 +2473,17 @@
             </a:pPr>
             <a:r>
               <a:rPr lang="en-US" dirty="0"/>
-              <a:t>Low the user switch back and forth between histograms and boxplots to represent this information.  You could do this with a radio button that switches the plot from histogram to boxplot … the implementation however is up to you.  </a:t>
+              <a:t>Allow the user to filter the histograms / boxplots above by job type. </a:t>
+            </a:r>
+          </a:p>
+          <a:p>
+            <a:pPr marL="800100" lvl="1" indent="-342900">
+              <a:buFontTx/>
+              <a:buAutoNum type="arabicPeriod"/>
+            </a:pPr>
+            <a:r>
+              <a:rPr lang="en-US" dirty="0"/>
+              <a:t>Let the user make a bar plot of the attrition levels. </a:t>
             </a:r>
           </a:p>
           <a:p>
@@ -2482,7 +2492,7 @@
             </a:pPr>
             <a:r>
               <a:rPr lang="en-US" dirty="0"/>
-              <a:t>Allow the user to filter the histograms / boxplots above by state. </a:t>
+              <a:t>Add a scatter plot of monthly income versus job type.</a:t>
             </a:r>
           </a:p>
           <a:p>
@@ -2491,7 +2501,7 @@
             </a:pPr>
             <a:r>
               <a:rPr lang="en-US" dirty="0"/>
-              <a:t>In addition to the histograms, add a scatter plot of IBU v. ABV</a:t>
+              <a:t>Add the ability to add or take off the simple linear regression line. </a:t>
             </a:r>
           </a:p>
           <a:p>
@@ -2500,16 +2510,7 @@
             </a:pPr>
             <a:r>
               <a:rPr lang="en-US" dirty="0"/>
-              <a:t>Add the ability to add or take off the simple linear regression line. </a:t>
-            </a:r>
-          </a:p>
-          <a:p>
-            <a:pPr marL="800100" lvl="1" indent="-342900">
-              <a:buAutoNum type="arabicPeriod"/>
-            </a:pPr>
-            <a:r>
-              <a:rPr lang="en-US" dirty="0"/>
-              <a:t>Allow the user to filter the data on the scatter plot by state.</a:t>
+              <a:t>Allow the user to filter the data on the scatter plot by job type.</a:t>
             </a:r>
           </a:p>
           <a:p>
@@ -2680,15 +2681,9 @@
               <a:rPr lang="en-US" dirty="0">
                 <a:hlinkClick r:id="rId2"/>
               </a:rPr>
-              <a:t>https://docs.google.com/document/d/1P89Ru3LqpBf_D8Uoe8LbAmV3-sza-4xjJR2r4ayyqko/edit?usp</a:t>
-            </a:r>
-            <a:r>
-              <a:rPr lang="en-US">
-                <a:hlinkClick r:id="rId2"/>
-              </a:rPr>
-              <a:t>=sharing</a:t>
-            </a:r>
-            <a:endParaRPr lang="en-US"/>
+              <a:t>https://docs.google.com/document/d/1P89Ru3LqpBf_D8Uoe8LbAmV3-sza-4xjJR2r4ayyqko/edit?usp=sharing</a:t>
+            </a:r>
+            <a:endParaRPr lang="en-US" dirty="0"/>
           </a:p>
           <a:p>
             <a:pPr lvl="1"/>
